--- a/apresentacao/apresentacao_primeira_infancia_alimentacao.pptx
+++ b/apresentacao/apresentacao_primeira_infancia_alimentacao.pptx
@@ -1312,7 +1312,7 @@
             <a:r>
               <a:rPr lang="en-US" dirty="0"/>
               <a:t>Dado ad hoc (apresentacao/variantes/alimentacao_adhoc/). Só nesta apresentação: dado pontual não vai para o relatório nem
-para a versão final do site (constitution §3). Confirmar com a equipe: programa/fonte, data, o que é "fase de expansão" e
+para a versão final do site (constitution §3). Fonte: Territórios Sociais (IPP/ONU-Habitat), informada pelo usuário em 2026-10-06. Confirmar com a equipe: data, o que é "fase de expansão" e
 como foi medida a insegurança alimentar (escala, ex. EBIA). A leitura das CAPs é visual (mapa de calor, sem números).</a:t>
             </a:r>
             <a:endParaRPr lang="en-US" dirty="0"/>
